--- a/2DGP 프로젝트 2차 발표.pptx
+++ b/2DGP 프로젝트 2차 발표.pptx
@@ -3536,8 +3536,8 @@
         </p:nvSpPr>
         <p:spPr>
           <a:xfrm flipH="false" flipV="false" rot="0">
-            <a:off x="1752744" y="1929393"/>
-            <a:ext cx="14782513" cy="7483647"/>
+            <a:off x="1520148" y="1914081"/>
+            <a:ext cx="15247704" cy="7700091"/>
           </a:xfrm>
           <a:custGeom>
             <a:avLst/>
@@ -3546,18 +3546,18 @@
             <a:cxnLst/>
             <a:rect r="r" b="b" t="t" l="l"/>
             <a:pathLst>
-              <a:path h="7483647" w="14782513">
+              <a:path h="7700091" w="15247704">
                 <a:moveTo>
                   <a:pt x="0" y="0"/>
                 </a:moveTo>
                 <a:lnTo>
-                  <a:pt x="14782512" y="0"/>
+                  <a:pt x="15247704" y="0"/>
                 </a:lnTo>
                 <a:lnTo>
-                  <a:pt x="14782512" y="7483647"/>
+                  <a:pt x="15247704" y="7700091"/>
                 </a:lnTo>
                 <a:lnTo>
-                  <a:pt x="0" y="7483647"/>
+                  <a:pt x="0" y="7700091"/>
                 </a:lnTo>
                 <a:lnTo>
                   <a:pt x="0" y="0"/>
@@ -3758,6 +3758,50 @@
                 <a:sym typeface="각진펜 Bold"/>
               </a:rPr>
               <a:t>프로젝트 개발 진행 상황</a:t>
+            </a:r>
+          </a:p>
+        </p:txBody>
+      </p:sp>
+      <p:sp>
+        <p:nvSpPr>
+          <p:cNvPr name="TextBox 11" id="11"/>
+          <p:cNvSpPr txBox="true"/>
+          <p:nvPr/>
+        </p:nvSpPr>
+        <p:spPr>
+          <a:xfrm rot="0">
+            <a:off x="13435353" y="747712"/>
+            <a:ext cx="2013539" cy="504826"/>
+          </a:xfrm>
+          <a:prstGeom prst="rect">
+            <a:avLst/>
+          </a:prstGeom>
+        </p:spPr>
+        <p:txBody>
+          <a:bodyPr anchor="t" rtlCol="false" tIns="0" lIns="0" bIns="0" rIns="0">
+            <a:spAutoFit/>
+          </a:bodyPr>
+          <a:lstStyle/>
+          <a:p>
+            <a:pPr algn="ctr">
+              <a:lnSpc>
+                <a:spcPts val="4199"/>
+              </a:lnSpc>
+              <a:spcBef>
+                <a:spcPct val="0"/>
+              </a:spcBef>
+            </a:pPr>
+            <a:r>
+              <a:rPr lang="en-US" b="true" sz="2999">
+                <a:solidFill>
+                  <a:srgbClr val="000000"/>
+                </a:solidFill>
+                <a:latin typeface="각진펜 Bold"/>
+                <a:ea typeface="각진펜 Bold"/>
+                <a:cs typeface="각진펜 Bold"/>
+                <a:sym typeface="각진펜 Bold"/>
+              </a:rPr>
+              <a:t>평균 47%</a:t>
             </a:r>
           </a:p>
         </p:txBody>
